--- a/templates/abstract.pptx
+++ b/templates/abstract.pptx
@@ -3314,7 +3314,7 @@
         <a:srgbClr val="E7E6E6"/>
       </a:lt2>
       <a:accent1>
-        <a:srgbClr val="E9E6DF"/>
+        <a:srgbClr val="8E8172"/>
       </a:accent1>
       <a:accent2>
         <a:srgbClr val="ED7D31"/>

--- a/templates/abstract.pptx
+++ b/templates/abstract.pptx
@@ -2127,7 +2127,7 @@
         <p:spPr>
           <a:xfrm>
             <a:off x="838200" y="1825625"/>
-            <a:ext cx="5181600" cy="4351338"/>
+            <a:ext cx="5120640" cy="4351338"/>
           </a:xfrm>
         </p:spPr>
         <p:txBody>
@@ -2180,8 +2180,8 @@
         </p:nvSpPr>
         <p:spPr>
           <a:xfrm>
-            <a:off x="6172200" y="1825625"/>
-            <a:ext cx="5181600" cy="4351338"/>
+            <a:off x="6233160" y="1825625"/>
+            <a:ext cx="5120640" cy="4351338"/>
           </a:xfrm>
         </p:spPr>
         <p:txBody>

--- a/templates/abstract.pptx
+++ b/templates/abstract.pptx
@@ -1737,7 +1737,7 @@
           <a:p>
             <a:r>
               <a:rPr lang="en-US" dirty="0"/>
-              <a:t>PRESENTATION TITLE</a:t>
+              <a:t/>
             </a:r>
           </a:p>
         </p:txBody>
@@ -2012,7 +2012,7 @@
           <a:p>
             <a:r>
               <a:rPr lang="en-US" dirty="0"/>
-              <a:t>PRESENTATION TITLE</a:t>
+              <a:t/>
             </a:r>
           </a:p>
         </p:txBody>
@@ -2521,7 +2521,7 @@
           <a:p>
             <a:r>
               <a:rPr lang="en-US" dirty="0"/>
-              <a:t>PRESENTATION TITLE</a:t>
+              <a:t/>
             </a:r>
           </a:p>
         </p:txBody>

--- a/templates/abstract.pptx
+++ b/templates/abstract.pptx
@@ -1406,12 +1406,12 @@
         </p:nvSpPr>
         <p:spPr>
           <a:xfrm>
-            <a:off x="1322317" y="268360"/>
-            <a:ext cx="8724507" cy="2121177"/>
+            <a:off x="838200" y="365125"/>
+            <a:ext cx="10515600" cy="1325563"/>
           </a:xfrm>
         </p:spPr>
         <p:txBody>
-          <a:bodyPr anchor="b">
+          <a:bodyPr>
             <a:normAutofit/>
           </a:bodyPr>
           <a:lstStyle>
@@ -1452,8 +1452,8 @@
         </p:nvSpPr>
         <p:spPr>
           <a:xfrm>
-            <a:off x="1322387" y="2763078"/>
-            <a:ext cx="8724423" cy="3407051"/>
+            <a:off x="838200" y="1825625"/>
+            <a:ext cx="10515600" cy="4351338"/>
           </a:xfrm>
         </p:spPr>
         <p:txBody>

--- a/templates/abstract.pptx
+++ b/templates/abstract.pptx
@@ -1453,7 +1453,7 @@
         <p:spPr>
           <a:xfrm>
             <a:off x="838200" y="1825625"/>
-            <a:ext cx="10515600" cy="4351338"/>
+            <a:ext cx="9525000" cy="4351338"/>
           </a:xfrm>
         </p:spPr>
         <p:txBody>

--- a/templates/abstract.pptx
+++ b/templates/abstract.pptx
@@ -1453,7 +1453,7 @@
         <p:spPr>
           <a:xfrm>
             <a:off x="838200" y="1825625"/>
-            <a:ext cx="9525000" cy="4351338"/>
+            <a:ext cx="10515600" cy="4351338"/>
           </a:xfrm>
         </p:spPr>
         <p:txBody>
